--- a/material/Python/14_파일입출력.pptx
+++ b/material/Python/14_파일입출력.pptx
@@ -1,6 +1,6 @@
 
 <file path=ppt/presentation.xml><?xml version="1.0" encoding="utf-8"?>
-<p:presentation xmlns:a="http://schemas.openxmlformats.org/drawingml/2006/main" xmlns:r="http://schemas.openxmlformats.org/officeDocument/2006/relationships" xmlns:p="http://schemas.openxmlformats.org/presentationml/2006/main" saveSubsetFonts="1">
+<p:presentation xmlns:a="http://schemas.openxmlformats.org/drawingml/2006/main" xmlns:r="http://schemas.openxmlformats.org/officeDocument/2006/relationships" xmlns:p="http://schemas.openxmlformats.org/presentationml/2006/main" embedTrueTypeFonts="1" saveSubsetFonts="1">
   <p:sldMasterIdLst>
     <p:sldMasterId id="2147483660" r:id="rId1"/>
   </p:sldMasterIdLst>
@@ -53,6 +53,33 @@
   </p:sldIdLst>
   <p:sldSz cx="12192000" cy="6858000"/>
   <p:notesSz cx="6858000" cy="9144000"/>
+  <p:embeddedFontLst>
+    <p:embeddedFont>
+      <p:font typeface="G마켓 산스 TTF Bold" panose="02000000000000000000" pitchFamily="2" charset="-127"/>
+      <p:bold r:id="rId45"/>
+    </p:embeddedFont>
+    <p:embeddedFont>
+      <p:font typeface="Pretendard Black" panose="02000A03000000020004" pitchFamily="2" charset="-127"/>
+      <p:bold r:id="rId46"/>
+    </p:embeddedFont>
+    <p:embeddedFont>
+      <p:font typeface="Pretendard Light" panose="02000403000000020004" pitchFamily="2" charset="-127"/>
+      <p:regular r:id="rId47"/>
+    </p:embeddedFont>
+    <p:embeddedFont>
+      <p:font typeface="Pretendard Medium" panose="02000603000000020004" pitchFamily="2" charset="-127"/>
+      <p:regular r:id="rId48"/>
+    </p:embeddedFont>
+    <p:embeddedFont>
+      <p:font typeface="Malgun Gothic Semilight" panose="020B0502040204020203" pitchFamily="50" charset="-127"/>
+      <p:regular r:id="rId49"/>
+    </p:embeddedFont>
+    <p:embeddedFont>
+      <p:font typeface="메이플스토리" panose="02000300000000000000" pitchFamily="2" charset="-127"/>
+      <p:regular r:id="rId50"/>
+      <p:bold r:id="rId51"/>
+    </p:embeddedFont>
+  </p:embeddedFontLst>
   <p:defaultTextStyle>
     <a:defPPr>
       <a:defRPr lang="ko-KR"/>
@@ -259,7 +286,7 @@
             <a:fld id="{A13A867C-D490-40C2-AB8D-A60FA70A9BF5}" type="datetimeFigureOut">
               <a:rPr lang="ko-KR" altLang="en-US" smtClean="0"/>
               <a:pPr/>
-              <a:t>2025-07-29</a:t>
+              <a:t>2025-08-21</a:t>
             </a:fld>
             <a:endParaRPr lang="ko-KR" altLang="en-US" dirty="0"/>
           </a:p>
@@ -1141,7 +1168,7 @@
           <a:p>
             <a:fld id="{442BEE3F-2E9A-4FD8-8B8A-8619F3E161C0}" type="datetime1">
               <a:rPr lang="ko-KR" altLang="en-US" smtClean="0"/>
-              <a:t>2025-07-29</a:t>
+              <a:t>2025-08-21</a:t>
             </a:fld>
             <a:endParaRPr lang="ko-KR" altLang="en-US"/>
           </a:p>
@@ -1428,7 +1455,7 @@
           <a:p>
             <a:fld id="{0F78D9C4-20C1-4B15-A116-16DC77AD9A1E}" type="datetime1">
               <a:rPr lang="ko-KR" altLang="en-US" smtClean="0"/>
-              <a:t>2025-07-29</a:t>
+              <a:t>2025-08-21</a:t>
             </a:fld>
             <a:endParaRPr lang="ko-KR" altLang="en-US"/>
           </a:p>
@@ -1603,7 +1630,7 @@
           <a:p>
             <a:fld id="{7F5E23C3-0E3D-4E4E-8486-D7FB4C073DC1}" type="datetime1">
               <a:rPr lang="ko-KR" altLang="en-US" smtClean="0"/>
-              <a:t>2025-07-29</a:t>
+              <a:t>2025-08-21</a:t>
             </a:fld>
             <a:endParaRPr lang="ko-KR" altLang="en-US"/>
           </a:p>
@@ -1716,7 +1743,7 @@
           <a:p>
             <a:fld id="{10C5FEB5-5F88-4F49-9108-1795E314F09F}" type="datetime1">
               <a:rPr lang="ko-KR" altLang="en-US" smtClean="0"/>
-              <a:t>2025-07-29</a:t>
+              <a:t>2025-08-21</a:t>
             </a:fld>
             <a:endParaRPr lang="ko-KR" altLang="en-US"/>
           </a:p>
@@ -2128,7 +2155,7 @@
           <a:p>
             <a:fld id="{051A8C49-CED7-4A86-9B4A-621D7F62EE92}" type="datetime1">
               <a:rPr lang="ko-KR" altLang="en-US" smtClean="0"/>
-              <a:t>2025-07-29</a:t>
+              <a:t>2025-08-21</a:t>
             </a:fld>
             <a:endParaRPr lang="ko-KR" altLang="en-US"/>
           </a:p>
@@ -2457,7 +2484,7 @@
           <a:p>
             <a:fld id="{7F5E23C3-0E3D-4E4E-8486-D7FB4C073DC1}" type="datetime1">
               <a:rPr lang="ko-KR" altLang="en-US" smtClean="0"/>
-              <a:t>2025-07-29</a:t>
+              <a:t>2025-08-21</a:t>
             </a:fld>
             <a:endParaRPr lang="ko-KR" altLang="en-US"/>
           </a:p>
@@ -3298,7 +3325,7 @@
           <a:p>
             <a:fld id="{0F78D9C4-20C1-4B15-A116-16DC77AD9A1E}" type="datetime1">
               <a:rPr lang="ko-KR" altLang="en-US" smtClean="0"/>
-              <a:t>2025-07-29</a:t>
+              <a:t>2025-08-21</a:t>
             </a:fld>
             <a:endParaRPr lang="ko-KR" altLang="en-US"/>
           </a:p>
@@ -3578,7 +3605,7 @@
           <a:p>
             <a:fld id="{0F78D9C4-20C1-4B15-A116-16DC77AD9A1E}" type="datetime1">
               <a:rPr lang="ko-KR" altLang="en-US" smtClean="0"/>
-              <a:t>2025-07-29</a:t>
+              <a:t>2025-08-21</a:t>
             </a:fld>
             <a:endParaRPr lang="ko-KR" altLang="en-US"/>
           </a:p>
@@ -5389,7 +5416,7 @@
           <a:p>
             <a:fld id="{0F78D9C4-20C1-4B15-A116-16DC77AD9A1E}" type="datetime1">
               <a:rPr lang="ko-KR" altLang="en-US" smtClean="0"/>
-              <a:t>2025-07-29</a:t>
+              <a:t>2025-08-21</a:t>
             </a:fld>
             <a:endParaRPr lang="ko-KR" altLang="en-US"/>
           </a:p>
@@ -5971,7 +5998,7 @@
           <a:p>
             <a:fld id="{0F78D9C4-20C1-4B15-A116-16DC77AD9A1E}" type="datetime1">
               <a:rPr lang="ko-KR" altLang="en-US" smtClean="0"/>
-              <a:t>2025-07-29</a:t>
+              <a:t>2025-08-21</a:t>
             </a:fld>
             <a:endParaRPr lang="ko-KR" altLang="en-US"/>
           </a:p>
@@ -6219,7 +6246,7 @@
           <a:p>
             <a:fld id="{0F78D9C4-20C1-4B15-A116-16DC77AD9A1E}" type="datetime1">
               <a:rPr lang="ko-KR" altLang="en-US" smtClean="0"/>
-              <a:t>2025-07-29</a:t>
+              <a:t>2025-08-21</a:t>
             </a:fld>
             <a:endParaRPr lang="ko-KR" altLang="en-US"/>
           </a:p>
@@ -7411,7 +7438,7 @@
           <a:p>
             <a:fld id="{0F78D9C4-20C1-4B15-A116-16DC77AD9A1E}" type="datetime1">
               <a:rPr lang="ko-KR" altLang="en-US" smtClean="0"/>
-              <a:t>2025-07-29</a:t>
+              <a:t>2025-08-21</a:t>
             </a:fld>
             <a:endParaRPr lang="ko-KR" altLang="en-US"/>
           </a:p>
@@ -8041,7 +8068,7 @@
           <a:p>
             <a:fld id="{0F78D9C4-20C1-4B15-A116-16DC77AD9A1E}" type="datetime1">
               <a:rPr lang="ko-KR" altLang="en-US" smtClean="0"/>
-              <a:t>2025-07-29</a:t>
+              <a:t>2025-08-21</a:t>
             </a:fld>
             <a:endParaRPr lang="ko-KR" altLang="en-US"/>
           </a:p>
@@ -8515,7 +8542,7 @@
           <a:p>
             <a:fld id="{0F78D9C4-20C1-4B15-A116-16DC77AD9A1E}" type="datetime1">
               <a:rPr lang="ko-KR" altLang="en-US" smtClean="0"/>
-              <a:t>2025-07-29</a:t>
+              <a:t>2025-08-21</a:t>
             </a:fld>
             <a:endParaRPr lang="ko-KR" altLang="en-US"/>
           </a:p>
@@ -9053,7 +9080,7 @@
           <a:p>
             <a:fld id="{0F78D9C4-20C1-4B15-A116-16DC77AD9A1E}" type="datetime1">
               <a:rPr lang="ko-KR" altLang="en-US" smtClean="0"/>
-              <a:t>2025-07-29</a:t>
+              <a:t>2025-08-21</a:t>
             </a:fld>
             <a:endParaRPr lang="ko-KR" altLang="en-US"/>
           </a:p>
@@ -9803,7 +9830,7 @@
           <a:p>
             <a:fld id="{0F78D9C4-20C1-4B15-A116-16DC77AD9A1E}" type="datetime1">
               <a:rPr lang="ko-KR" altLang="en-US" smtClean="0"/>
-              <a:t>2025-07-29</a:t>
+              <a:t>2025-08-21</a:t>
             </a:fld>
             <a:endParaRPr lang="ko-KR" altLang="en-US"/>
           </a:p>
@@ -10310,7 +10337,7 @@
           <a:p>
             <a:fld id="{0F78D9C4-20C1-4B15-A116-16DC77AD9A1E}" type="datetime1">
               <a:rPr lang="ko-KR" altLang="en-US" smtClean="0"/>
-              <a:t>2025-07-29</a:t>
+              <a:t>2025-08-21</a:t>
             </a:fld>
             <a:endParaRPr lang="ko-KR" altLang="en-US"/>
           </a:p>
@@ -10902,7 +10929,7 @@
           <a:p>
             <a:fld id="{0F78D9C4-20C1-4B15-A116-16DC77AD9A1E}" type="datetime1">
               <a:rPr lang="ko-KR" altLang="en-US" smtClean="0"/>
-              <a:t>2025-07-29</a:t>
+              <a:t>2025-08-21</a:t>
             </a:fld>
             <a:endParaRPr lang="ko-KR" altLang="en-US"/>
           </a:p>
@@ -11566,7 +11593,7 @@
           <a:p>
             <a:fld id="{0F78D9C4-20C1-4B15-A116-16DC77AD9A1E}" type="datetime1">
               <a:rPr lang="ko-KR" altLang="en-US" smtClean="0"/>
-              <a:t>2025-07-29</a:t>
+              <a:t>2025-08-21</a:t>
             </a:fld>
             <a:endParaRPr lang="ko-KR" altLang="en-US"/>
           </a:p>
@@ -11982,7 +12009,7 @@
           <a:p>
             <a:fld id="{0F78D9C4-20C1-4B15-A116-16DC77AD9A1E}" type="datetime1">
               <a:rPr lang="ko-KR" altLang="en-US" smtClean="0"/>
-              <a:t>2025-07-29</a:t>
+              <a:t>2025-08-21</a:t>
             </a:fld>
             <a:endParaRPr lang="ko-KR" altLang="en-US"/>
           </a:p>
@@ -12468,7 +12495,7 @@
           <a:p>
             <a:fld id="{0F78D9C4-20C1-4B15-A116-16DC77AD9A1E}" type="datetime1">
               <a:rPr lang="ko-KR" altLang="en-US" smtClean="0"/>
-              <a:t>2025-07-29</a:t>
+              <a:t>2025-08-21</a:t>
             </a:fld>
             <a:endParaRPr lang="ko-KR" altLang="en-US"/>
           </a:p>
@@ -13020,7 +13047,7 @@
           <a:p>
             <a:fld id="{0F78D9C4-20C1-4B15-A116-16DC77AD9A1E}" type="datetime1">
               <a:rPr lang="ko-KR" altLang="en-US" smtClean="0"/>
-              <a:t>2025-07-29</a:t>
+              <a:t>2025-08-21</a:t>
             </a:fld>
             <a:endParaRPr lang="ko-KR" altLang="en-US"/>
           </a:p>
@@ -13572,7 +13599,7 @@
           <a:p>
             <a:fld id="{0F78D9C4-20C1-4B15-A116-16DC77AD9A1E}" type="datetime1">
               <a:rPr lang="ko-KR" altLang="en-US" smtClean="0"/>
-              <a:t>2025-07-29</a:t>
+              <a:t>2025-08-21</a:t>
             </a:fld>
             <a:endParaRPr lang="ko-KR" altLang="en-US"/>
           </a:p>
@@ -14181,7 +14208,7 @@
           <a:p>
             <a:fld id="{0F78D9C4-20C1-4B15-A116-16DC77AD9A1E}" type="datetime1">
               <a:rPr lang="ko-KR" altLang="en-US" smtClean="0"/>
-              <a:t>2025-07-29</a:t>
+              <a:t>2025-08-21</a:t>
             </a:fld>
             <a:endParaRPr lang="ko-KR" altLang="en-US"/>
           </a:p>
@@ -14429,7 +14456,7 @@
           <a:p>
             <a:fld id="{0F78D9C4-20C1-4B15-A116-16DC77AD9A1E}" type="datetime1">
               <a:rPr lang="ko-KR" altLang="en-US" smtClean="0"/>
-              <a:t>2025-07-29</a:t>
+              <a:t>2025-08-21</a:t>
             </a:fld>
             <a:endParaRPr lang="ko-KR" altLang="en-US"/>
           </a:p>
@@ -14873,7 +14900,7 @@
           <a:p>
             <a:fld id="{0F78D9C4-20C1-4B15-A116-16DC77AD9A1E}" type="datetime1">
               <a:rPr lang="ko-KR" altLang="en-US" smtClean="0"/>
-              <a:t>2025-07-29</a:t>
+              <a:t>2025-08-21</a:t>
             </a:fld>
             <a:endParaRPr lang="ko-KR" altLang="en-US"/>
           </a:p>
@@ -15352,7 +15379,7 @@
           <a:p>
             <a:fld id="{0F78D9C4-20C1-4B15-A116-16DC77AD9A1E}" type="datetime1">
               <a:rPr lang="ko-KR" altLang="en-US" smtClean="0"/>
-              <a:t>2025-07-29</a:t>
+              <a:t>2025-08-21</a:t>
             </a:fld>
             <a:endParaRPr lang="ko-KR" altLang="en-US"/>
           </a:p>
@@ -15774,7 +15801,7 @@
           <a:p>
             <a:fld id="{0F78D9C4-20C1-4B15-A116-16DC77AD9A1E}" type="datetime1">
               <a:rPr lang="ko-KR" altLang="en-US" smtClean="0"/>
-              <a:t>2025-07-29</a:t>
+              <a:t>2025-08-21</a:t>
             </a:fld>
             <a:endParaRPr lang="ko-KR" altLang="en-US"/>
           </a:p>
@@ -16308,7 +16335,7 @@
           <a:p>
             <a:fld id="{0F78D9C4-20C1-4B15-A116-16DC77AD9A1E}" type="datetime1">
               <a:rPr lang="ko-KR" altLang="en-US" smtClean="0"/>
-              <a:t>2025-07-29</a:t>
+              <a:t>2025-08-21</a:t>
             </a:fld>
             <a:endParaRPr lang="ko-KR" altLang="en-US"/>
           </a:p>
@@ -16600,7 +16627,7 @@
           <a:p>
             <a:fld id="{0F78D9C4-20C1-4B15-A116-16DC77AD9A1E}" type="datetime1">
               <a:rPr lang="ko-KR" altLang="en-US" smtClean="0"/>
-              <a:t>2025-07-29</a:t>
+              <a:t>2025-08-21</a:t>
             </a:fld>
             <a:endParaRPr lang="ko-KR" altLang="en-US"/>
           </a:p>
@@ -16820,7 +16847,7 @@
           <a:p>
             <a:fld id="{0F78D9C4-20C1-4B15-A116-16DC77AD9A1E}" type="datetime1">
               <a:rPr lang="ko-KR" altLang="en-US" smtClean="0"/>
-              <a:t>2025-07-29</a:t>
+              <a:t>2025-08-21</a:t>
             </a:fld>
             <a:endParaRPr lang="ko-KR" altLang="en-US"/>
           </a:p>
@@ -21730,7 +21757,7 @@
           <a:p>
             <a:fld id="{0F78D9C4-20C1-4B15-A116-16DC77AD9A1E}" type="datetime1">
               <a:rPr lang="ko-KR" altLang="en-US" smtClean="0"/>
-              <a:t>2025-07-29</a:t>
+              <a:t>2025-08-21</a:t>
             </a:fld>
             <a:endParaRPr lang="ko-KR" altLang="en-US"/>
           </a:p>
@@ -23067,7 +23094,7 @@
           <a:p>
             <a:fld id="{0F78D9C4-20C1-4B15-A116-16DC77AD9A1E}" type="datetime1">
               <a:rPr lang="ko-KR" altLang="en-US" smtClean="0"/>
-              <a:t>2025-07-29</a:t>
+              <a:t>2025-08-21</a:t>
             </a:fld>
             <a:endParaRPr lang="ko-KR" altLang="en-US"/>
           </a:p>
@@ -23447,7 +23474,7 @@
           <a:p>
             <a:fld id="{0F78D9C4-20C1-4B15-A116-16DC77AD9A1E}" type="datetime1">
               <a:rPr lang="ko-KR" altLang="en-US" smtClean="0"/>
-              <a:t>2025-07-29</a:t>
+              <a:t>2025-08-21</a:t>
             </a:fld>
             <a:endParaRPr lang="ko-KR" altLang="en-US"/>
           </a:p>
